--- a/output_pptx/Hear_Our_Praises.pptx
+++ b/output_pptx/Hear_Our_Praises.pptx
@@ -3108,8 +3108,8 @@
         </p:nvSpPr>
         <p:spPr>
           <a:xfrm>
-            <a:off x="594360" y="2258568"/>
-            <a:ext cx="11002975" cy="685800"/>
+            <a:off x="640080" y="2052828"/>
+            <a:ext cx="10911535" cy="731520"/>
           </a:xfrm>
           <a:prstGeom prst="rect">
             <a:avLst/>
@@ -3124,7 +3124,7 @@
           <a:p>
             <a:pPr algn="ctr"/>
             <a:r>
-              <a:rPr sz="4400" b="1" i="0">
+              <a:rPr sz="4800" b="1" i="0">
                 <a:solidFill>
                   <a:srgbClr val="FFFFFF"/>
                 </a:solidFill>
@@ -3143,8 +3143,8 @@
         </p:nvSpPr>
         <p:spPr>
           <a:xfrm>
-            <a:off x="594360" y="2980944"/>
-            <a:ext cx="11002975" cy="347472"/>
+            <a:off x="640080" y="2985516"/>
+            <a:ext cx="10911535" cy="731520"/>
           </a:xfrm>
           <a:prstGeom prst="rect">
             <a:avLst/>
@@ -3159,83 +3159,13 @@
           <a:p>
             <a:pPr algn="ctr"/>
             <a:r>
-              <a:rPr sz="2200" b="0" i="1">
-                <a:solidFill>
-                  <a:srgbClr val="8C8C8C"/>
-                </a:solidFill>
-                <a:latin typeface="Arial"/>
-              </a:rPr>
-              <a:t/>
-            </a:r>
-          </a:p>
-        </p:txBody>
-      </p:sp>
-      <p:sp>
-        <p:nvSpPr>
-          <p:cNvPr id="4" name="TextBox 3"/>
-          <p:cNvSpPr txBox="1"/>
-          <p:nvPr/>
-        </p:nvSpPr>
-        <p:spPr>
-          <a:xfrm>
-            <a:off x="594360" y="3529584"/>
-            <a:ext cx="11002975" cy="685800"/>
-          </a:xfrm>
-          <a:prstGeom prst="rect">
-            <a:avLst/>
-          </a:prstGeom>
-          <a:noFill/>
-        </p:spPr>
-        <p:txBody>
-          <a:bodyPr wrap="square">
-            <a:spAutoFit/>
-          </a:bodyPr>
-          <a:lstStyle/>
-          <a:p>
-            <a:pPr algn="ctr"/>
-            <a:r>
-              <a:rPr sz="3352" b="1" i="0">
+              <a:rPr sz="3600" b="1" i="0">
                 <a:solidFill>
                   <a:srgbClr val="FFFFFF"/>
                 </a:solidFill>
                 <a:latin typeface="Arial"/>
               </a:rPr>
               <a:t>Que os nossos lares sejam cheios de danças</a:t>
-            </a:r>
-          </a:p>
-        </p:txBody>
-      </p:sp>
-      <p:sp>
-        <p:nvSpPr>
-          <p:cNvPr id="5" name="TextBox 4"/>
-          <p:cNvSpPr txBox="1"/>
-          <p:nvPr/>
-        </p:nvSpPr>
-        <p:spPr>
-          <a:xfrm>
-            <a:off x="594360" y="4251960"/>
-            <a:ext cx="11002975" cy="347472"/>
-          </a:xfrm>
-          <a:prstGeom prst="rect">
-            <a:avLst/>
-          </a:prstGeom>
-          <a:noFill/>
-        </p:spPr>
-        <p:txBody>
-          <a:bodyPr wrap="square">
-            <a:spAutoFit/>
-          </a:bodyPr>
-          <a:lstStyle/>
-          <a:p>
-            <a:pPr algn="ctr"/>
-            <a:r>
-              <a:rPr sz="2200" b="0" i="1">
-                <a:solidFill>
-                  <a:srgbClr val="8C8C8C"/>
-                </a:solidFill>
-                <a:latin typeface="Arial"/>
-              </a:rPr>
-              <a:t/>
             </a:r>
           </a:p>
         </p:txBody>
@@ -3274,8 +3204,8 @@
         </p:nvSpPr>
         <p:spPr>
           <a:xfrm>
-            <a:off x="594360" y="2258568"/>
-            <a:ext cx="11002975" cy="685800"/>
+            <a:off x="640080" y="2052828"/>
+            <a:ext cx="10911535" cy="731520"/>
           </a:xfrm>
           <a:prstGeom prst="rect">
             <a:avLst/>
@@ -3290,7 +3220,7 @@
           <a:p>
             <a:pPr algn="ctr"/>
             <a:r>
-              <a:rPr sz="3352" b="1" i="0">
+              <a:rPr sz="3600" b="1" i="0">
                 <a:solidFill>
                   <a:srgbClr val="FFFFFF"/>
                 </a:solidFill>
@@ -3309,8 +3239,8 @@
         </p:nvSpPr>
         <p:spPr>
           <a:xfrm>
-            <a:off x="594360" y="2980944"/>
-            <a:ext cx="11002975" cy="347472"/>
+            <a:off x="640080" y="2985516"/>
+            <a:ext cx="10911535" cy="731520"/>
           </a:xfrm>
           <a:prstGeom prst="rect">
             <a:avLst/>
@@ -3325,83 +3255,13 @@
           <a:p>
             <a:pPr algn="ctr"/>
             <a:r>
-              <a:rPr sz="2200" b="0" i="1">
-                <a:solidFill>
-                  <a:srgbClr val="8C8C8C"/>
-                </a:solidFill>
-                <a:latin typeface="Arial"/>
-              </a:rPr>
-              <a:t/>
-            </a:r>
-          </a:p>
-        </p:txBody>
-      </p:sp>
-      <p:sp>
-        <p:nvSpPr>
-          <p:cNvPr id="4" name="TextBox 3"/>
-          <p:cNvSpPr txBox="1"/>
-          <p:nvPr/>
-        </p:nvSpPr>
-        <p:spPr>
-          <a:xfrm>
-            <a:off x="594360" y="3529584"/>
-            <a:ext cx="11002975" cy="685800"/>
-          </a:xfrm>
-          <a:prstGeom prst="rect">
-            <a:avLst/>
-          </a:prstGeom>
-          <a:noFill/>
-        </p:spPr>
-        <p:txBody>
-          <a:bodyPr wrap="square">
-            <a:spAutoFit/>
-          </a:bodyPr>
-          <a:lstStyle/>
-          <a:p>
-            <a:pPr algn="ctr"/>
-            <a:r>
-              <a:rPr sz="4141" b="1" i="0">
+              <a:rPr sz="4500" b="1" i="0">
                 <a:solidFill>
                   <a:srgbClr val="FFFFFF"/>
                 </a:solidFill>
                 <a:latin typeface="Arial"/>
               </a:rPr>
               <a:t>Que a injustiça se prostre a Jesus</a:t>
-            </a:r>
-          </a:p>
-        </p:txBody>
-      </p:sp>
-      <p:sp>
-        <p:nvSpPr>
-          <p:cNvPr id="5" name="TextBox 4"/>
-          <p:cNvSpPr txBox="1"/>
-          <p:nvPr/>
-        </p:nvSpPr>
-        <p:spPr>
-          <a:xfrm>
-            <a:off x="594360" y="4251960"/>
-            <a:ext cx="11002975" cy="347472"/>
-          </a:xfrm>
-          <a:prstGeom prst="rect">
-            <a:avLst/>
-          </a:prstGeom>
-          <a:noFill/>
-        </p:spPr>
-        <p:txBody>
-          <a:bodyPr wrap="square">
-            <a:spAutoFit/>
-          </a:bodyPr>
-          <a:lstStyle/>
-          <a:p>
-            <a:pPr algn="ctr"/>
-            <a:r>
-              <a:rPr sz="2200" b="0" i="1">
-                <a:solidFill>
-                  <a:srgbClr val="8C8C8C"/>
-                </a:solidFill>
-                <a:latin typeface="Arial"/>
-              </a:rPr>
-              <a:t/>
             </a:r>
           </a:p>
         </p:txBody>
@@ -3440,8 +3300,8 @@
         </p:nvSpPr>
         <p:spPr>
           <a:xfrm>
-            <a:off x="594360" y="2258568"/>
-            <a:ext cx="11002975" cy="685800"/>
+            <a:off x="640080" y="2052828"/>
+            <a:ext cx="10911535" cy="731520"/>
           </a:xfrm>
           <a:prstGeom prst="rect">
             <a:avLst/>
@@ -3456,7 +3316,7 @@
           <a:p>
             <a:pPr algn="ctr"/>
             <a:r>
-              <a:rPr sz="4400" b="1" i="0">
+              <a:rPr sz="4800" b="1" i="0">
                 <a:solidFill>
                   <a:srgbClr val="FFFFFF"/>
                 </a:solidFill>
@@ -3475,8 +3335,8 @@
         </p:nvSpPr>
         <p:spPr>
           <a:xfrm>
-            <a:off x="594360" y="2980944"/>
-            <a:ext cx="11002975" cy="347472"/>
+            <a:off x="640080" y="2985516"/>
+            <a:ext cx="10911535" cy="731520"/>
           </a:xfrm>
           <a:prstGeom prst="rect">
             <a:avLst/>
@@ -3491,83 +3351,13 @@
           <a:p>
             <a:pPr algn="ctr"/>
             <a:r>
-              <a:rPr sz="2200" b="0" i="1">
-                <a:solidFill>
-                  <a:srgbClr val="8C8C8C"/>
-                </a:solidFill>
-                <a:latin typeface="Arial"/>
-              </a:rPr>
-              <a:t/>
-            </a:r>
-          </a:p>
-        </p:txBody>
-      </p:sp>
-      <p:sp>
-        <p:nvSpPr>
-          <p:cNvPr id="4" name="TextBox 3"/>
-          <p:cNvSpPr txBox="1"/>
-          <p:nvPr/>
-        </p:nvSpPr>
-        <p:spPr>
-          <a:xfrm>
-            <a:off x="594360" y="3529584"/>
-            <a:ext cx="11002975" cy="685800"/>
-          </a:xfrm>
-          <a:prstGeom prst="rect">
-            <a:avLst/>
-          </a:prstGeom>
-          <a:noFill/>
-        </p:spPr>
-        <p:txBody>
-          <a:bodyPr wrap="square">
-            <a:spAutoFit/>
-          </a:bodyPr>
-          <a:lstStyle/>
-          <a:p>
-            <a:pPr algn="ctr"/>
-            <a:r>
-              <a:rPr sz="4400" b="1" i="0">
+              <a:rPr sz="4800" b="1" i="0">
                 <a:solidFill>
                   <a:srgbClr val="FFFFFF"/>
                 </a:solidFill>
                 <a:latin typeface="Arial"/>
               </a:rPr>
               <a:t>Das montanhas até os vales</a:t>
-            </a:r>
-          </a:p>
-        </p:txBody>
-      </p:sp>
-      <p:sp>
-        <p:nvSpPr>
-          <p:cNvPr id="5" name="TextBox 4"/>
-          <p:cNvSpPr txBox="1"/>
-          <p:nvPr/>
-        </p:nvSpPr>
-        <p:spPr>
-          <a:xfrm>
-            <a:off x="594360" y="4251960"/>
-            <a:ext cx="11002975" cy="347472"/>
-          </a:xfrm>
-          <a:prstGeom prst="rect">
-            <a:avLst/>
-          </a:prstGeom>
-          <a:noFill/>
-        </p:spPr>
-        <p:txBody>
-          <a:bodyPr wrap="square">
-            <a:spAutoFit/>
-          </a:bodyPr>
-          <a:lstStyle/>
-          <a:p>
-            <a:pPr algn="ctr"/>
-            <a:r>
-              <a:rPr sz="2200" b="0" i="1">
-                <a:solidFill>
-                  <a:srgbClr val="8C8C8C"/>
-                </a:solidFill>
-                <a:latin typeface="Arial"/>
-              </a:rPr>
-              <a:t/>
             </a:r>
           </a:p>
         </p:txBody>
@@ -3606,8 +3396,8 @@
         </p:nvSpPr>
         <p:spPr>
           <a:xfrm>
-            <a:off x="594360" y="2258568"/>
-            <a:ext cx="11002975" cy="685800"/>
+            <a:off x="640080" y="2052828"/>
+            <a:ext cx="10911535" cy="731520"/>
           </a:xfrm>
           <a:prstGeom prst="rect">
             <a:avLst/>
@@ -3622,7 +3412,7 @@
           <a:p>
             <a:pPr algn="ctr"/>
             <a:r>
-              <a:rPr sz="4022" b="1" i="0">
+              <a:rPr sz="4300" b="1" i="0">
                 <a:solidFill>
                   <a:srgbClr val="FFFFFF"/>
                 </a:solidFill>
@@ -3641,8 +3431,8 @@
         </p:nvSpPr>
         <p:spPr>
           <a:xfrm>
-            <a:off x="594360" y="2980944"/>
-            <a:ext cx="11002975" cy="347472"/>
+            <a:off x="640080" y="2985516"/>
+            <a:ext cx="10911535" cy="731520"/>
           </a:xfrm>
           <a:prstGeom prst="rect">
             <a:avLst/>
@@ -3657,83 +3447,13 @@
           <a:p>
             <a:pPr algn="ctr"/>
             <a:r>
-              <a:rPr sz="2200" b="0" i="1">
-                <a:solidFill>
-                  <a:srgbClr val="8C8C8C"/>
-                </a:solidFill>
-                <a:latin typeface="Arial"/>
-              </a:rPr>
-              <a:t/>
-            </a:r>
-          </a:p>
-        </p:txBody>
-      </p:sp>
-      <p:sp>
-        <p:nvSpPr>
-          <p:cNvPr id="4" name="TextBox 3"/>
-          <p:cNvSpPr txBox="1"/>
-          <p:nvPr/>
-        </p:nvSpPr>
-        <p:spPr>
-          <a:xfrm>
-            <a:off x="594360" y="3529584"/>
-            <a:ext cx="11002975" cy="685800"/>
-          </a:xfrm>
-          <a:prstGeom prst="rect">
-            <a:avLst/>
-          </a:prstGeom>
-          <a:noFill/>
-        </p:spPr>
-        <p:txBody>
-          <a:bodyPr wrap="square">
-            <a:spAutoFit/>
-          </a:bodyPr>
-          <a:lstStyle/>
-          <a:p>
-            <a:pPr algn="ctr"/>
-            <a:r>
-              <a:rPr sz="4400" b="1" i="0">
+              <a:rPr sz="4800" b="1" i="0">
                 <a:solidFill>
                   <a:srgbClr val="FFFFFF"/>
                 </a:solidFill>
                 <a:latin typeface="Arial"/>
               </a:rPr>
               <a:t>Dos céus até as nações</a:t>
-            </a:r>
-          </a:p>
-        </p:txBody>
-      </p:sp>
-      <p:sp>
-        <p:nvSpPr>
-          <p:cNvPr id="5" name="TextBox 4"/>
-          <p:cNvSpPr txBox="1"/>
-          <p:nvPr/>
-        </p:nvSpPr>
-        <p:spPr>
-          <a:xfrm>
-            <a:off x="594360" y="4251960"/>
-            <a:ext cx="11002975" cy="347472"/>
-          </a:xfrm>
-          <a:prstGeom prst="rect">
-            <a:avLst/>
-          </a:prstGeom>
-          <a:noFill/>
-        </p:spPr>
-        <p:txBody>
-          <a:bodyPr wrap="square">
-            <a:spAutoFit/>
-          </a:bodyPr>
-          <a:lstStyle/>
-          <a:p>
-            <a:pPr algn="ctr"/>
-            <a:r>
-              <a:rPr sz="2200" b="0" i="1">
-                <a:solidFill>
-                  <a:srgbClr val="8C8C8C"/>
-                </a:solidFill>
-                <a:latin typeface="Arial"/>
-              </a:rPr>
-              <a:t/>
             </a:r>
           </a:p>
         </p:txBody>
@@ -3772,8 +3492,8 @@
         </p:nvSpPr>
         <p:spPr>
           <a:xfrm>
-            <a:off x="594360" y="2258568"/>
-            <a:ext cx="11002975" cy="685800"/>
+            <a:off x="640080" y="2052828"/>
+            <a:ext cx="10911535" cy="731520"/>
           </a:xfrm>
           <a:prstGeom prst="rect">
             <a:avLst/>
@@ -3788,7 +3508,7 @@
           <a:p>
             <a:pPr algn="ctr"/>
             <a:r>
-              <a:rPr sz="4400" b="1" i="0">
+              <a:rPr sz="4800" b="1" i="0">
                 <a:solidFill>
                   <a:srgbClr val="FFFFFF"/>
                 </a:solidFill>
@@ -3807,8 +3527,8 @@
         </p:nvSpPr>
         <p:spPr>
           <a:xfrm>
-            <a:off x="594360" y="2980944"/>
-            <a:ext cx="11002975" cy="347472"/>
+            <a:off x="640080" y="2985516"/>
+            <a:ext cx="10911535" cy="731520"/>
           </a:xfrm>
           <a:prstGeom prst="rect">
             <a:avLst/>
@@ -3823,83 +3543,13 @@
           <a:p>
             <a:pPr algn="ctr"/>
             <a:r>
-              <a:rPr sz="2200" b="0" i="1">
-                <a:solidFill>
-                  <a:srgbClr val="8C8C8C"/>
-                </a:solidFill>
-                <a:latin typeface="Arial"/>
-              </a:rPr>
-              <a:t/>
-            </a:r>
-          </a:p>
-        </p:txBody>
-      </p:sp>
-      <p:sp>
-        <p:nvSpPr>
-          <p:cNvPr id="4" name="TextBox 3"/>
-          <p:cNvSpPr txBox="1"/>
-          <p:nvPr/>
-        </p:nvSpPr>
-        <p:spPr>
-          <a:xfrm>
-            <a:off x="594360" y="3529584"/>
-            <a:ext cx="11002975" cy="685800"/>
-          </a:xfrm>
-          <a:prstGeom prst="rect">
-            <a:avLst/>
-          </a:prstGeom>
-          <a:noFill/>
-        </p:spPr>
-        <p:txBody>
-          <a:bodyPr wrap="square">
-            <a:spAutoFit/>
-          </a:bodyPr>
-          <a:lstStyle/>
-          <a:p>
-            <a:pPr algn="ctr"/>
-            <a:r>
-              <a:rPr sz="4022" b="1" i="0">
+              <a:rPr sz="4300" b="1" i="0">
                 <a:solidFill>
                   <a:srgbClr val="FFFFFF"/>
                 </a:solidFill>
                 <a:latin typeface="Arial"/>
               </a:rPr>
               <a:t>Ouça nossos louvores se erguer a Ti</a:t>
-            </a:r>
-          </a:p>
-        </p:txBody>
-      </p:sp>
-      <p:sp>
-        <p:nvSpPr>
-          <p:cNvPr id="5" name="TextBox 4"/>
-          <p:cNvSpPr txBox="1"/>
-          <p:nvPr/>
-        </p:nvSpPr>
-        <p:spPr>
-          <a:xfrm>
-            <a:off x="594360" y="4251960"/>
-            <a:ext cx="11002975" cy="347472"/>
-          </a:xfrm>
-          <a:prstGeom prst="rect">
-            <a:avLst/>
-          </a:prstGeom>
-          <a:noFill/>
-        </p:spPr>
-        <p:txBody>
-          <a:bodyPr wrap="square">
-            <a:spAutoFit/>
-          </a:bodyPr>
-          <a:lstStyle/>
-          <a:p>
-            <a:pPr algn="ctr"/>
-            <a:r>
-              <a:rPr sz="2200" b="0" i="1">
-                <a:solidFill>
-                  <a:srgbClr val="8C8C8C"/>
-                </a:solidFill>
-                <a:latin typeface="Arial"/>
-              </a:rPr>
-              <a:t/>
             </a:r>
           </a:p>
         </p:txBody>

--- a/output_pptx/Hear_Our_Praises.pptx
+++ b/output_pptx/Hear_Our_Praises.pptx
@@ -3170,6 +3170,76 @@
           </a:p>
         </p:txBody>
       </p:sp>
+      <p:sp>
+        <p:nvSpPr>
+          <p:cNvPr id="4" name="TextBox 3"/>
+          <p:cNvSpPr txBox="1"/>
+          <p:nvPr/>
+        </p:nvSpPr>
+        <p:spPr>
+          <a:xfrm>
+            <a:off x="640080" y="4128516"/>
+            <a:ext cx="10911535" cy="310896"/>
+          </a:xfrm>
+          <a:prstGeom prst="rect">
+            <a:avLst/>
+          </a:prstGeom>
+          <a:noFill/>
+        </p:spPr>
+        <p:txBody>
+          <a:bodyPr wrap="square">
+            <a:spAutoFit/>
+          </a:bodyPr>
+          <a:lstStyle/>
+          <a:p>
+            <a:pPr algn="ctr"/>
+            <a:r>
+              <a:rPr sz="2000" b="0" i="0">
+                <a:solidFill>
+                  <a:srgbClr val="828282"/>
+                </a:solidFill>
+                <a:latin typeface="Arial"/>
+              </a:rPr>
+              <a:t>我らの家庭が</a:t>
+            </a:r>
+          </a:p>
+        </p:txBody>
+      </p:sp>
+      <p:sp>
+        <p:nvSpPr>
+          <p:cNvPr id="5" name="TextBox 4"/>
+          <p:cNvSpPr txBox="1"/>
+          <p:nvPr/>
+        </p:nvSpPr>
+        <p:spPr>
+          <a:xfrm>
+            <a:off x="640080" y="4494276"/>
+            <a:ext cx="10911535" cy="310896"/>
+          </a:xfrm>
+          <a:prstGeom prst="rect">
+            <a:avLst/>
+          </a:prstGeom>
+          <a:noFill/>
+        </p:spPr>
+        <p:txBody>
+          <a:bodyPr wrap="square">
+            <a:spAutoFit/>
+          </a:bodyPr>
+          <a:lstStyle/>
+          <a:p>
+            <a:pPr algn="ctr"/>
+            <a:r>
+              <a:rPr sz="2000" b="0" i="0">
+                <a:solidFill>
+                  <a:srgbClr val="828282"/>
+                </a:solidFill>
+                <a:latin typeface="Arial"/>
+              </a:rPr>
+              <a:t>我らの家庭が踊りで満ちますように</a:t>
+            </a:r>
+          </a:p>
+        </p:txBody>
+      </p:sp>
     </p:spTree>
   </p:cSld>
   <p:clrMapOvr>
@@ -3266,6 +3336,76 @@
           </a:p>
         </p:txBody>
       </p:sp>
+      <p:sp>
+        <p:nvSpPr>
+          <p:cNvPr id="4" name="TextBox 3"/>
+          <p:cNvSpPr txBox="1"/>
+          <p:nvPr/>
+        </p:nvSpPr>
+        <p:spPr>
+          <a:xfrm>
+            <a:off x="640080" y="4128516"/>
+            <a:ext cx="10911535" cy="310896"/>
+          </a:xfrm>
+          <a:prstGeom prst="rect">
+            <a:avLst/>
+          </a:prstGeom>
+          <a:noFill/>
+        </p:spPr>
+        <p:txBody>
+          <a:bodyPr wrap="square">
+            <a:spAutoFit/>
+          </a:bodyPr>
+          <a:lstStyle/>
+          <a:p>
+            <a:pPr algn="ctr"/>
+            <a:r>
+              <a:rPr sz="2000" b="0" i="0">
+                <a:solidFill>
+                  <a:srgbClr val="828282"/>
+                </a:solidFill>
+                <a:latin typeface="Arial"/>
+              </a:rPr>
+              <a:t>我らの通りが喜びで満ちますように</a:t>
+            </a:r>
+          </a:p>
+        </p:txBody>
+      </p:sp>
+      <p:sp>
+        <p:nvSpPr>
+          <p:cNvPr id="5" name="TextBox 4"/>
+          <p:cNvSpPr txBox="1"/>
+          <p:nvPr/>
+        </p:nvSpPr>
+        <p:spPr>
+          <a:xfrm>
+            <a:off x="640080" y="4494276"/>
+            <a:ext cx="10911535" cy="310896"/>
+          </a:xfrm>
+          <a:prstGeom prst="rect">
+            <a:avLst/>
+          </a:prstGeom>
+          <a:noFill/>
+        </p:spPr>
+        <p:txBody>
+          <a:bodyPr wrap="square">
+            <a:spAutoFit/>
+          </a:bodyPr>
+          <a:lstStyle/>
+          <a:p>
+            <a:pPr algn="ctr"/>
+            <a:r>
+              <a:rPr sz="2000" b="0" i="0">
+                <a:solidFill>
+                  <a:srgbClr val="828282"/>
+                </a:solidFill>
+                <a:latin typeface="Arial"/>
+              </a:rPr>
+              <a:t>不正がイエスの前にひれ伏しますように</a:t>
+            </a:r>
+          </a:p>
+        </p:txBody>
+      </p:sp>
     </p:spTree>
   </p:cSld>
   <p:clrMapOvr>
@@ -3362,6 +3502,76 @@
           </a:p>
         </p:txBody>
       </p:sp>
+      <p:sp>
+        <p:nvSpPr>
+          <p:cNvPr id="4" name="TextBox 3"/>
+          <p:cNvSpPr txBox="1"/>
+          <p:nvPr/>
+        </p:nvSpPr>
+        <p:spPr>
+          <a:xfrm>
+            <a:off x="640080" y="4128516"/>
+            <a:ext cx="10911535" cy="310896"/>
+          </a:xfrm>
+          <a:prstGeom prst="rect">
+            <a:avLst/>
+          </a:prstGeom>
+          <a:noFill/>
+        </p:spPr>
+        <p:txBody>
+          <a:bodyPr wrap="square">
+            <a:spAutoFit/>
+          </a:bodyPr>
+          <a:lstStyle/>
+          <a:p>
+            <a:pPr algn="ctr"/>
+            <a:r>
+              <a:rPr sz="2000" b="0" i="0">
+                <a:solidFill>
+                  <a:srgbClr val="828282"/>
+                </a:solidFill>
+                <a:latin typeface="Arial"/>
+              </a:rPr>
+              <a:t>民が祈りに立ち返る</a:t>
+            </a:r>
+          </a:p>
+        </p:txBody>
+      </p:sp>
+      <p:sp>
+        <p:nvSpPr>
+          <p:cNvPr id="5" name="TextBox 4"/>
+          <p:cNvSpPr txBox="1"/>
+          <p:nvPr/>
+        </p:nvSpPr>
+        <p:spPr>
+          <a:xfrm>
+            <a:off x="640080" y="4494276"/>
+            <a:ext cx="10911535" cy="310896"/>
+          </a:xfrm>
+          <a:prstGeom prst="rect">
+            <a:avLst/>
+          </a:prstGeom>
+          <a:noFill/>
+        </p:spPr>
+        <p:txBody>
+          <a:bodyPr wrap="square">
+            <a:spAutoFit/>
+          </a:bodyPr>
+          <a:lstStyle/>
+          <a:p>
+            <a:pPr algn="ctr"/>
+            <a:r>
+              <a:rPr sz="2000" b="0" i="0">
+                <a:solidFill>
+                  <a:srgbClr val="828282"/>
+                </a:solidFill>
+                <a:latin typeface="Arial"/>
+              </a:rPr>
+              <a:t>山々から谷間まで</a:t>
+            </a:r>
+          </a:p>
+        </p:txBody>
+      </p:sp>
     </p:spTree>
   </p:cSld>
   <p:clrMapOvr>
@@ -3458,6 +3668,76 @@
           </a:p>
         </p:txBody>
       </p:sp>
+      <p:sp>
+        <p:nvSpPr>
+          <p:cNvPr id="4" name="TextBox 3"/>
+          <p:cNvSpPr txBox="1"/>
+          <p:nvPr/>
+        </p:nvSpPr>
+        <p:spPr>
+          <a:xfrm>
+            <a:off x="640080" y="4128516"/>
+            <a:ext cx="10911535" cy="310896"/>
+          </a:xfrm>
+          <a:prstGeom prst="rect">
+            <a:avLst/>
+          </a:prstGeom>
+          <a:noFill/>
+        </p:spPr>
+        <p:txBody>
+          <a:bodyPr wrap="square">
+            <a:spAutoFit/>
+          </a:bodyPr>
+          <a:lstStyle/>
+          <a:p>
+            <a:pPr algn="ctr"/>
+            <a:r>
+              <a:rPr sz="2000" b="0" i="0">
+                <a:solidFill>
+                  <a:srgbClr val="828282"/>
+                </a:solidFill>
+                <a:latin typeface="Arial"/>
+              </a:rPr>
+              <a:t>私たちの賛美があなたへ立ち上るのを聞いてください</a:t>
+            </a:r>
+          </a:p>
+        </p:txBody>
+      </p:sp>
+      <p:sp>
+        <p:nvSpPr>
+          <p:cNvPr id="5" name="TextBox 4"/>
+          <p:cNvSpPr txBox="1"/>
+          <p:nvPr/>
+        </p:nvSpPr>
+        <p:spPr>
+          <a:xfrm>
+            <a:off x="640080" y="4494276"/>
+            <a:ext cx="10911535" cy="310896"/>
+          </a:xfrm>
+          <a:prstGeom prst="rect">
+            <a:avLst/>
+          </a:prstGeom>
+          <a:noFill/>
+        </p:spPr>
+        <p:txBody>
+          <a:bodyPr wrap="square">
+            <a:spAutoFit/>
+          </a:bodyPr>
+          <a:lstStyle/>
+          <a:p>
+            <a:pPr algn="ctr"/>
+            <a:r>
+              <a:rPr sz="2000" b="0" i="0">
+                <a:solidFill>
+                  <a:srgbClr val="828282"/>
+                </a:solidFill>
+                <a:latin typeface="Arial"/>
+              </a:rPr>
+              <a:t>天から諸国民まで</a:t>
+            </a:r>
+          </a:p>
+        </p:txBody>
+      </p:sp>
     </p:spTree>
   </p:cSld>
   <p:clrMapOvr>
@@ -3550,6 +3830,76 @@
                 <a:latin typeface="Arial"/>
               </a:rPr>
               <a:t>Ouça nossos louvores se erguer a Ti</a:t>
+            </a:r>
+          </a:p>
+        </p:txBody>
+      </p:sp>
+      <p:sp>
+        <p:nvSpPr>
+          <p:cNvPr id="4" name="TextBox 3"/>
+          <p:cNvSpPr txBox="1"/>
+          <p:nvPr/>
+        </p:nvSpPr>
+        <p:spPr>
+          <a:xfrm>
+            <a:off x="640080" y="4128516"/>
+            <a:ext cx="10911535" cy="310896"/>
+          </a:xfrm>
+          <a:prstGeom prst="rect">
+            <a:avLst/>
+          </a:prstGeom>
+          <a:noFill/>
+        </p:spPr>
+        <p:txBody>
+          <a:bodyPr wrap="square">
+            <a:spAutoFit/>
+          </a:bodyPr>
+          <a:lstStyle/>
+          <a:p>
+            <a:pPr algn="ctr"/>
+            <a:r>
+              <a:rPr sz="2000" b="0" i="0">
+                <a:solidFill>
+                  <a:srgbClr val="828282"/>
+                </a:solidFill>
+                <a:latin typeface="Arial"/>
+              </a:rPr>
+              <a:t>山々から谷間まで</a:t>
+            </a:r>
+          </a:p>
+        </p:txBody>
+      </p:sp>
+      <p:sp>
+        <p:nvSpPr>
+          <p:cNvPr id="5" name="TextBox 4"/>
+          <p:cNvSpPr txBox="1"/>
+          <p:nvPr/>
+        </p:nvSpPr>
+        <p:spPr>
+          <a:xfrm>
+            <a:off x="640080" y="4494276"/>
+            <a:ext cx="10911535" cy="310896"/>
+          </a:xfrm>
+          <a:prstGeom prst="rect">
+            <a:avLst/>
+          </a:prstGeom>
+          <a:noFill/>
+        </p:spPr>
+        <p:txBody>
+          <a:bodyPr wrap="square">
+            <a:spAutoFit/>
+          </a:bodyPr>
+          <a:lstStyle/>
+          <a:p>
+            <a:pPr algn="ctr"/>
+            <a:r>
+              <a:rPr sz="2000" b="0" i="0">
+                <a:solidFill>
+                  <a:srgbClr val="828282"/>
+                </a:solidFill>
+                <a:latin typeface="Arial"/>
+              </a:rPr>
+              <a:t>私たちの賛美があなたへ立ち上るのを聞いてください</a:t>
             </a:r>
           </a:p>
         </p:txBody>
